--- a/Flux_Intelligence_Presentation.pptx
+++ b/Flux_Intelligence_Presentation.pptx
@@ -2398,7 +2398,7 @@
                 <a:sym typeface="Calibri"/>
               </a:rPr>
               <a:t>Team Flux | Adarsh Dubey (0117) | Roshan Binoj (0009) | Mohammed Siraj (0132) | Hafiz (0006)
-Generated: 2026-03-17</a:t>
+Generated: 2026-03-21</a:t>
             </a:r>
           </a:p>
         </p:txBody>
@@ -6830,35 +6830,7 @@
                 <a:ea typeface="Calibri"/>
                 <a:sym typeface="Calibri"/>
               </a:rPr>
-              <a:t>•  INFERENCE: Factors OTHER than distance (traffic, weather) are key delay drivers</a:t>
-            </a:r>
-          </a:p>
-          <a:p>
-            <a:pPr algn="l" marL="0" marR="0">
-              <a:lnSpc>
-                <a:spcPct val="100000"/>
-              </a:lnSpc>
-              <a:spcBef>
-                <a:spcPts val="0"/>
-              </a:spcBef>
-              <a:spcAft>
-                <a:spcPts val="0"/>
-              </a:spcAft>
-              <a:buNone/>
-            </a:pPr>
-            <a:r>
-              <a:rPr cap="none" sz="1300" i="0" b="0" u="none" strike="noStrike">
-                <a:solidFill>
-                  <a:srgbClr val="ECF0F1">
-                    <a:alpha val="100000"/>
-                  </a:srgbClr>
-                </a:solidFill>
-                <a:latin typeface="Calibri"/>
-                <a:cs typeface="Calibri"/>
-                <a:ea typeface="Calibri"/>
-                <a:sym typeface="Calibri"/>
-              </a:rPr>
-              <a:t>•  Slice &amp; Pick enables dynamic filtering by traffic level and weather impact</a:t>
+              <a:t>•  Slice &amp; Pick enables dynamic filtering by traffic level.</a:t>
             </a:r>
           </a:p>
         </p:txBody>
@@ -7110,7 +7082,7 @@
                 <a:ea typeface="Calibri"/>
                 <a:sym typeface="Calibri"/>
               </a:rPr>
-              <a:t>•  Weather categories overlap in PCA space - not clearly separable alone</a:t>
+              <a:t>•  PCA reveals how traffic density and distance cluster in the feature space</a:t>
             </a:r>
           </a:p>
           <a:p>
